--- a/plots/adjusted_meld3.pptx
+++ b/plots/adjusted_meld3.pptx
@@ -2951,528 +2951,528 @@
           </p:nvSpPr>
           <p:spPr>
             <a:xfrm>
-              <a:off x="1019512" y="3696228"/>
-              <a:ext cx="7591371" cy="1368667"/>
+              <a:off x="1019512" y="3208038"/>
+              <a:ext cx="7591371" cy="1856857"/>
             </a:xfrm>
             <a:custGeom>
               <a:avLst/>
               <a:pathLst>
-                <a:path w="7591371" h="1368667">
+                <a:path w="7591371" h="1856857">
                   <a:moveTo>
-                    <a:pt x="0" y="1368667"/>
+                    <a:pt x="0" y="1856857"/>
                   </a:moveTo>
                   <a:lnTo>
-                    <a:pt x="84348" y="1368667"/>
-                  </a:lnTo>
-                  <a:lnTo>
-                    <a:pt x="84348" y="1342830"/>
-                  </a:lnTo>
-                  <a:lnTo>
-                    <a:pt x="168697" y="1342830"/>
-                  </a:lnTo>
-                  <a:lnTo>
-                    <a:pt x="168697" y="1316984"/>
-                  </a:lnTo>
-                  <a:lnTo>
-                    <a:pt x="253045" y="1316984"/>
-                  </a:lnTo>
-                  <a:lnTo>
-                    <a:pt x="253045" y="1291034"/>
-                  </a:lnTo>
-                  <a:lnTo>
-                    <a:pt x="337394" y="1291034"/>
-                  </a:lnTo>
-                  <a:lnTo>
-                    <a:pt x="337394" y="1277935"/>
-                  </a:lnTo>
-                  <a:lnTo>
-                    <a:pt x="421742" y="1277935"/>
-                  </a:lnTo>
-                  <a:lnTo>
-                    <a:pt x="421742" y="1251798"/>
-                  </a:lnTo>
-                  <a:lnTo>
-                    <a:pt x="506091" y="1251798"/>
-                  </a:lnTo>
-                  <a:lnTo>
-                    <a:pt x="506091" y="1225679"/>
-                  </a:lnTo>
-                  <a:lnTo>
-                    <a:pt x="590440" y="1225679"/>
-                  </a:lnTo>
-                  <a:lnTo>
-                    <a:pt x="590440" y="1186560"/>
-                  </a:lnTo>
-                  <a:lnTo>
-                    <a:pt x="674788" y="1186560"/>
-                  </a:lnTo>
-                  <a:lnTo>
-                    <a:pt x="674788" y="1173390"/>
-                  </a:lnTo>
-                  <a:lnTo>
-                    <a:pt x="759137" y="1173390"/>
-                  </a:lnTo>
-                  <a:lnTo>
-                    <a:pt x="759137" y="1108182"/>
-                  </a:lnTo>
-                  <a:lnTo>
-                    <a:pt x="843485" y="1108182"/>
-                  </a:lnTo>
-                  <a:lnTo>
-                    <a:pt x="843485" y="1068521"/>
-                  </a:lnTo>
-                  <a:lnTo>
-                    <a:pt x="927834" y="1068521"/>
-                  </a:lnTo>
-                  <a:lnTo>
-                    <a:pt x="927834" y="1015534"/>
-                  </a:lnTo>
-                  <a:lnTo>
-                    <a:pt x="1012182" y="1015534"/>
-                  </a:lnTo>
-                  <a:lnTo>
-                    <a:pt x="1012182" y="923324"/>
-                  </a:lnTo>
-                  <a:lnTo>
-                    <a:pt x="1096531" y="923324"/>
-                  </a:lnTo>
-                  <a:lnTo>
-                    <a:pt x="1096531" y="882677"/>
-                  </a:lnTo>
-                  <a:lnTo>
-                    <a:pt x="1180880" y="882677"/>
-                  </a:lnTo>
-                  <a:lnTo>
-                    <a:pt x="1180880" y="855223"/>
-                  </a:lnTo>
-                  <a:lnTo>
-                    <a:pt x="1265228" y="855223"/>
-                  </a:lnTo>
-                  <a:lnTo>
-                    <a:pt x="1265228" y="814252"/>
-                  </a:lnTo>
-                  <a:lnTo>
-                    <a:pt x="1349577" y="814252"/>
-                  </a:lnTo>
-                  <a:lnTo>
-                    <a:pt x="1349577" y="786622"/>
-                  </a:lnTo>
-                  <a:lnTo>
-                    <a:pt x="1433925" y="786622"/>
-                  </a:lnTo>
-                  <a:lnTo>
-                    <a:pt x="1433925" y="758926"/>
-                  </a:lnTo>
-                  <a:lnTo>
-                    <a:pt x="1518274" y="758926"/>
-                  </a:lnTo>
-                  <a:lnTo>
-                    <a:pt x="1518274" y="703762"/>
-                  </a:lnTo>
-                  <a:lnTo>
-                    <a:pt x="1602622" y="703762"/>
-                  </a:lnTo>
-                  <a:lnTo>
-                    <a:pt x="1602622" y="689787"/>
-                  </a:lnTo>
-                  <a:lnTo>
-                    <a:pt x="1686971" y="689787"/>
-                  </a:lnTo>
-                  <a:lnTo>
-                    <a:pt x="1686971" y="675836"/>
-                  </a:lnTo>
-                  <a:lnTo>
-                    <a:pt x="1771320" y="675836"/>
-                  </a:lnTo>
-                  <a:lnTo>
-                    <a:pt x="1771320" y="675836"/>
-                  </a:lnTo>
-                  <a:lnTo>
-                    <a:pt x="1855668" y="675836"/>
-                  </a:lnTo>
-                  <a:lnTo>
-                    <a:pt x="1855668" y="619655"/>
-                  </a:lnTo>
-                  <a:lnTo>
-                    <a:pt x="1940017" y="619655"/>
-                  </a:lnTo>
-                  <a:lnTo>
-                    <a:pt x="1940017" y="619655"/>
-                  </a:lnTo>
-                  <a:lnTo>
-                    <a:pt x="2024365" y="619655"/>
-                  </a:lnTo>
-                  <a:lnTo>
-                    <a:pt x="2024365" y="605489"/>
-                  </a:lnTo>
-                  <a:lnTo>
-                    <a:pt x="2108714" y="605489"/>
-                  </a:lnTo>
-                  <a:lnTo>
-                    <a:pt x="2108714" y="577214"/>
-                  </a:lnTo>
-                  <a:lnTo>
-                    <a:pt x="2193062" y="577214"/>
-                  </a:lnTo>
-                  <a:lnTo>
-                    <a:pt x="2193062" y="521098"/>
-                  </a:lnTo>
-                  <a:lnTo>
-                    <a:pt x="2277411" y="521098"/>
-                  </a:lnTo>
-                  <a:lnTo>
-                    <a:pt x="2277411" y="506823"/>
-                  </a:lnTo>
-                  <a:lnTo>
-                    <a:pt x="2361760" y="506823"/>
-                  </a:lnTo>
-                  <a:lnTo>
-                    <a:pt x="2361760" y="450016"/>
-                  </a:lnTo>
-                  <a:lnTo>
-                    <a:pt x="2446108" y="450016"/>
-                  </a:lnTo>
-                  <a:lnTo>
-                    <a:pt x="2446108" y="407143"/>
-                  </a:lnTo>
-                  <a:lnTo>
-                    <a:pt x="2530457" y="407143"/>
-                  </a:lnTo>
-                  <a:lnTo>
-                    <a:pt x="2530457" y="364273"/>
-                  </a:lnTo>
-                  <a:lnTo>
-                    <a:pt x="2614805" y="364273"/>
-                  </a:lnTo>
-                  <a:lnTo>
-                    <a:pt x="2614805" y="349789"/>
-                  </a:lnTo>
-                  <a:lnTo>
-                    <a:pt x="2699154" y="349789"/>
-                  </a:lnTo>
-                  <a:lnTo>
-                    <a:pt x="2699154" y="349789"/>
-                  </a:lnTo>
-                  <a:lnTo>
-                    <a:pt x="2783503" y="349789"/>
-                  </a:lnTo>
-                  <a:lnTo>
-                    <a:pt x="2783503" y="349789"/>
-                  </a:lnTo>
-                  <a:lnTo>
-                    <a:pt x="2867851" y="349789"/>
-                  </a:lnTo>
-                  <a:lnTo>
-                    <a:pt x="2867851" y="306644"/>
-                  </a:lnTo>
-                  <a:lnTo>
-                    <a:pt x="2952200" y="306644"/>
-                  </a:lnTo>
-                  <a:lnTo>
-                    <a:pt x="2952200" y="277700"/>
-                  </a:lnTo>
-                  <a:lnTo>
-                    <a:pt x="3036548" y="277700"/>
-                  </a:lnTo>
-                  <a:lnTo>
-                    <a:pt x="3036548" y="277700"/>
-                  </a:lnTo>
-                  <a:lnTo>
-                    <a:pt x="3120897" y="277700"/>
-                  </a:lnTo>
-                  <a:lnTo>
-                    <a:pt x="3120897" y="263200"/>
-                  </a:lnTo>
-                  <a:lnTo>
-                    <a:pt x="3205245" y="263200"/>
-                  </a:lnTo>
-                  <a:lnTo>
-                    <a:pt x="3205245" y="248715"/>
-                  </a:lnTo>
-                  <a:lnTo>
-                    <a:pt x="3289594" y="248715"/>
-                  </a:lnTo>
-                  <a:lnTo>
-                    <a:pt x="3289594" y="248715"/>
-                  </a:lnTo>
-                  <a:lnTo>
-                    <a:pt x="3373943" y="248715"/>
-                  </a:lnTo>
-                  <a:lnTo>
-                    <a:pt x="3373943" y="248715"/>
-                  </a:lnTo>
-                  <a:lnTo>
-                    <a:pt x="3458291" y="248715"/>
-                  </a:lnTo>
-                  <a:lnTo>
-                    <a:pt x="3458291" y="248715"/>
-                  </a:lnTo>
-                  <a:lnTo>
-                    <a:pt x="3542640" y="248715"/>
-                  </a:lnTo>
-                  <a:lnTo>
-                    <a:pt x="3542640" y="248715"/>
-                  </a:lnTo>
-                  <a:lnTo>
-                    <a:pt x="3626988" y="248715"/>
-                  </a:lnTo>
-                  <a:lnTo>
-                    <a:pt x="3626988" y="248715"/>
-                  </a:lnTo>
-                  <a:lnTo>
-                    <a:pt x="3711337" y="248715"/>
-                  </a:lnTo>
-                  <a:lnTo>
-                    <a:pt x="3711337" y="248715"/>
-                  </a:lnTo>
-                  <a:lnTo>
-                    <a:pt x="3795685" y="248715"/>
-                  </a:lnTo>
-                  <a:lnTo>
-                    <a:pt x="3795685" y="234241"/>
-                  </a:lnTo>
-                  <a:lnTo>
-                    <a:pt x="3880034" y="234241"/>
-                  </a:lnTo>
-                  <a:lnTo>
-                    <a:pt x="3880034" y="234241"/>
-                  </a:lnTo>
-                  <a:lnTo>
-                    <a:pt x="3964383" y="234241"/>
-                  </a:lnTo>
-                  <a:lnTo>
-                    <a:pt x="3964383" y="219752"/>
-                  </a:lnTo>
-                  <a:lnTo>
-                    <a:pt x="4048731" y="219752"/>
-                  </a:lnTo>
-                  <a:lnTo>
-                    <a:pt x="4048731" y="205258"/>
-                  </a:lnTo>
-                  <a:lnTo>
-                    <a:pt x="4133080" y="205258"/>
-                  </a:lnTo>
-                  <a:lnTo>
-                    <a:pt x="4133080" y="176441"/>
-                  </a:lnTo>
-                  <a:lnTo>
-                    <a:pt x="4217428" y="176441"/>
-                  </a:lnTo>
-                  <a:lnTo>
-                    <a:pt x="4217428" y="176441"/>
-                  </a:lnTo>
-                  <a:lnTo>
-                    <a:pt x="4301777" y="176441"/>
-                  </a:lnTo>
-                  <a:lnTo>
-                    <a:pt x="4301777" y="176441"/>
-                  </a:lnTo>
-                  <a:lnTo>
-                    <a:pt x="4386125" y="176441"/>
-                  </a:lnTo>
-                  <a:lnTo>
-                    <a:pt x="4386125" y="161906"/>
-                  </a:lnTo>
-                  <a:lnTo>
-                    <a:pt x="4470474" y="161906"/>
-                  </a:lnTo>
-                  <a:lnTo>
-                    <a:pt x="4470474" y="161906"/>
-                  </a:lnTo>
-                  <a:lnTo>
-                    <a:pt x="4554823" y="161906"/>
-                  </a:lnTo>
-                  <a:lnTo>
-                    <a:pt x="4554823" y="147364"/>
-                  </a:lnTo>
-                  <a:lnTo>
-                    <a:pt x="4639171" y="147364"/>
-                  </a:lnTo>
-                  <a:lnTo>
-                    <a:pt x="4639171" y="147364"/>
-                  </a:lnTo>
-                  <a:lnTo>
-                    <a:pt x="4723520" y="147364"/>
-                  </a:lnTo>
-                  <a:lnTo>
-                    <a:pt x="4723520" y="147364"/>
-                  </a:lnTo>
-                  <a:lnTo>
-                    <a:pt x="4807868" y="147364"/>
-                  </a:lnTo>
-                  <a:lnTo>
-                    <a:pt x="4807868" y="147364"/>
-                  </a:lnTo>
-                  <a:lnTo>
-                    <a:pt x="4892217" y="147364"/>
-                  </a:lnTo>
-                  <a:lnTo>
-                    <a:pt x="4892217" y="147364"/>
-                  </a:lnTo>
-                  <a:lnTo>
-                    <a:pt x="4976565" y="147364"/>
-                  </a:lnTo>
-                  <a:lnTo>
-                    <a:pt x="4976565" y="132791"/>
-                  </a:lnTo>
-                  <a:lnTo>
-                    <a:pt x="5060914" y="132791"/>
-                  </a:lnTo>
-                  <a:lnTo>
-                    <a:pt x="5060914" y="103766"/>
-                  </a:lnTo>
-                  <a:lnTo>
-                    <a:pt x="5145263" y="103766"/>
-                  </a:lnTo>
-                  <a:lnTo>
-                    <a:pt x="5145263" y="103766"/>
-                  </a:lnTo>
-                  <a:lnTo>
-                    <a:pt x="5229611" y="103766"/>
-                  </a:lnTo>
-                  <a:lnTo>
-                    <a:pt x="5229611" y="103766"/>
-                  </a:lnTo>
-                  <a:lnTo>
-                    <a:pt x="5313960" y="103766"/>
-                  </a:lnTo>
-                  <a:lnTo>
-                    <a:pt x="5313960" y="103766"/>
-                  </a:lnTo>
-                  <a:lnTo>
-                    <a:pt x="5398308" y="103766"/>
-                  </a:lnTo>
-                  <a:lnTo>
-                    <a:pt x="5398308" y="89192"/>
-                  </a:lnTo>
-                  <a:lnTo>
-                    <a:pt x="5482657" y="89192"/>
-                  </a:lnTo>
-                  <a:lnTo>
-                    <a:pt x="5482657" y="74635"/>
-                  </a:lnTo>
-                  <a:lnTo>
-                    <a:pt x="5567006" y="74635"/>
-                  </a:lnTo>
-                  <a:lnTo>
-                    <a:pt x="5567006" y="74635"/>
-                  </a:lnTo>
-                  <a:lnTo>
-                    <a:pt x="5651354" y="74635"/>
-                  </a:lnTo>
-                  <a:lnTo>
-                    <a:pt x="5651354" y="74635"/>
-                  </a:lnTo>
-                  <a:lnTo>
-                    <a:pt x="5735703" y="74635"/>
-                  </a:lnTo>
-                  <a:lnTo>
-                    <a:pt x="5735703" y="60001"/>
-                  </a:lnTo>
-                  <a:lnTo>
-                    <a:pt x="5820051" y="60001"/>
-                  </a:lnTo>
-                  <a:lnTo>
-                    <a:pt x="5820051" y="60001"/>
-                  </a:lnTo>
-                  <a:lnTo>
-                    <a:pt x="5904400" y="60001"/>
-                  </a:lnTo>
-                  <a:lnTo>
-                    <a:pt x="5904400" y="60001"/>
-                  </a:lnTo>
-                  <a:lnTo>
-                    <a:pt x="5988748" y="60001"/>
-                  </a:lnTo>
-                  <a:lnTo>
-                    <a:pt x="5988748" y="60001"/>
-                  </a:lnTo>
-                  <a:lnTo>
-                    <a:pt x="6073097" y="60001"/>
-                  </a:lnTo>
-                  <a:lnTo>
-                    <a:pt x="6073097" y="60001"/>
-                  </a:lnTo>
-                  <a:lnTo>
-                    <a:pt x="6157446" y="60001"/>
-                  </a:lnTo>
-                  <a:lnTo>
-                    <a:pt x="6157446" y="30129"/>
-                  </a:lnTo>
-                  <a:lnTo>
-                    <a:pt x="6241794" y="30129"/>
-                  </a:lnTo>
-                  <a:lnTo>
-                    <a:pt x="6241794" y="30129"/>
-                  </a:lnTo>
-                  <a:lnTo>
-                    <a:pt x="6326143" y="30129"/>
-                  </a:lnTo>
-                  <a:lnTo>
-                    <a:pt x="6326143" y="30129"/>
-                  </a:lnTo>
-                  <a:lnTo>
-                    <a:pt x="6410491" y="30129"/>
-                  </a:lnTo>
-                  <a:lnTo>
-                    <a:pt x="6410491" y="30129"/>
-                  </a:lnTo>
-                  <a:lnTo>
-                    <a:pt x="6494840" y="30129"/>
-                  </a:lnTo>
-                  <a:lnTo>
-                    <a:pt x="6494840" y="30129"/>
-                  </a:lnTo>
-                  <a:lnTo>
-                    <a:pt x="6579188" y="30129"/>
-                  </a:lnTo>
-                  <a:lnTo>
-                    <a:pt x="6579188" y="30129"/>
-                  </a:lnTo>
-                  <a:lnTo>
-                    <a:pt x="6663537" y="30129"/>
-                  </a:lnTo>
-                  <a:lnTo>
-                    <a:pt x="6663537" y="30129"/>
-                  </a:lnTo>
-                  <a:lnTo>
-                    <a:pt x="6747886" y="30129"/>
-                  </a:lnTo>
-                  <a:lnTo>
-                    <a:pt x="6747886" y="15060"/>
-                  </a:lnTo>
-                  <a:lnTo>
-                    <a:pt x="6832234" y="15060"/>
-                  </a:lnTo>
-                  <a:lnTo>
-                    <a:pt x="6832234" y="15060"/>
-                  </a:lnTo>
-                  <a:lnTo>
-                    <a:pt x="6916583" y="15060"/>
-                  </a:lnTo>
-                  <a:lnTo>
-                    <a:pt x="6916583" y="15060"/>
-                  </a:lnTo>
-                  <a:lnTo>
-                    <a:pt x="7000931" y="15060"/>
-                  </a:lnTo>
-                  <a:lnTo>
-                    <a:pt x="7000931" y="15060"/>
-                  </a:lnTo>
-                  <a:lnTo>
-                    <a:pt x="7085280" y="15060"/>
-                  </a:lnTo>
-                  <a:lnTo>
-                    <a:pt x="7085280" y="15060"/>
-                  </a:lnTo>
-                  <a:lnTo>
-                    <a:pt x="7169628" y="15060"/>
-                  </a:lnTo>
-                  <a:lnTo>
-                    <a:pt x="7169628" y="15060"/>
-                  </a:lnTo>
-                  <a:lnTo>
-                    <a:pt x="7253977" y="15060"/>
+                    <a:pt x="84348" y="1856857"/>
+                  </a:lnTo>
+                  <a:lnTo>
+                    <a:pt x="84348" y="1817143"/>
+                  </a:lnTo>
+                  <a:lnTo>
+                    <a:pt x="168697" y="1817143"/>
+                  </a:lnTo>
+                  <a:lnTo>
+                    <a:pt x="168697" y="1777584"/>
+                  </a:lnTo>
+                  <a:lnTo>
+                    <a:pt x="253045" y="1777584"/>
+                  </a:lnTo>
+                  <a:lnTo>
+                    <a:pt x="253045" y="1738034"/>
+                  </a:lnTo>
+                  <a:lnTo>
+                    <a:pt x="337394" y="1738034"/>
+                  </a:lnTo>
+                  <a:lnTo>
+                    <a:pt x="337394" y="1718133"/>
+                  </a:lnTo>
+                  <a:lnTo>
+                    <a:pt x="421742" y="1718133"/>
+                  </a:lnTo>
+                  <a:lnTo>
+                    <a:pt x="421742" y="1678558"/>
+                  </a:lnTo>
+                  <a:lnTo>
+                    <a:pt x="506091" y="1678558"/>
+                  </a:lnTo>
+                  <a:lnTo>
+                    <a:pt x="506091" y="1639181"/>
+                  </a:lnTo>
+                  <a:lnTo>
+                    <a:pt x="590440" y="1639181"/>
+                  </a:lnTo>
+                  <a:lnTo>
+                    <a:pt x="590440" y="1580531"/>
+                  </a:lnTo>
+                  <a:lnTo>
+                    <a:pt x="674788" y="1580531"/>
+                  </a:lnTo>
+                  <a:lnTo>
+                    <a:pt x="674788" y="1560874"/>
+                  </a:lnTo>
+                  <a:lnTo>
+                    <a:pt x="759137" y="1560874"/>
+                  </a:lnTo>
+                  <a:lnTo>
+                    <a:pt x="759137" y="1464203"/>
+                  </a:lnTo>
+                  <a:lnTo>
+                    <a:pt x="843485" y="1464203"/>
+                  </a:lnTo>
+                  <a:lnTo>
+                    <a:pt x="843485" y="1405944"/>
+                  </a:lnTo>
+                  <a:lnTo>
+                    <a:pt x="927834" y="1405944"/>
+                  </a:lnTo>
+                  <a:lnTo>
+                    <a:pt x="927834" y="1328752"/>
+                  </a:lnTo>
+                  <a:lnTo>
+                    <a:pt x="1012182" y="1328752"/>
+                  </a:lnTo>
+                  <a:lnTo>
+                    <a:pt x="1012182" y="1196180"/>
+                  </a:lnTo>
+                  <a:lnTo>
+                    <a:pt x="1096531" y="1196180"/>
+                  </a:lnTo>
+                  <a:lnTo>
+                    <a:pt x="1096531" y="1138459"/>
+                  </a:lnTo>
+                  <a:lnTo>
+                    <a:pt x="1180880" y="1138459"/>
+                  </a:lnTo>
+                  <a:lnTo>
+                    <a:pt x="1180880" y="1099723"/>
+                  </a:lnTo>
+                  <a:lnTo>
+                    <a:pt x="1265228" y="1099723"/>
+                  </a:lnTo>
+                  <a:lnTo>
+                    <a:pt x="1265228" y="1042295"/>
+                  </a:lnTo>
+                  <a:lnTo>
+                    <a:pt x="1349577" y="1042295"/>
+                  </a:lnTo>
+                  <a:lnTo>
+                    <a:pt x="1349577" y="1003824"/>
+                  </a:lnTo>
+                  <a:lnTo>
+                    <a:pt x="1433925" y="1003824"/>
+                  </a:lnTo>
+                  <a:lnTo>
+                    <a:pt x="1433925" y="965469"/>
+                  </a:lnTo>
+                  <a:lnTo>
+                    <a:pt x="1518274" y="965469"/>
+                  </a:lnTo>
+                  <a:lnTo>
+                    <a:pt x="1518274" y="889703"/>
+                  </a:lnTo>
+                  <a:lnTo>
+                    <a:pt x="1602622" y="889703"/>
+                  </a:lnTo>
+                  <a:lnTo>
+                    <a:pt x="1602622" y="870642"/>
+                  </a:lnTo>
+                  <a:lnTo>
+                    <a:pt x="1686971" y="870642"/>
+                  </a:lnTo>
+                  <a:lnTo>
+                    <a:pt x="1686971" y="851667"/>
+                  </a:lnTo>
+                  <a:lnTo>
+                    <a:pt x="1771320" y="851667"/>
+                  </a:lnTo>
+                  <a:lnTo>
+                    <a:pt x="1771320" y="851667"/>
+                  </a:lnTo>
+                  <a:lnTo>
+                    <a:pt x="1855668" y="851667"/>
+                  </a:lnTo>
+                  <a:lnTo>
+                    <a:pt x="1855668" y="775805"/>
+                  </a:lnTo>
+                  <a:lnTo>
+                    <a:pt x="1940017" y="775805"/>
+                  </a:lnTo>
+                  <a:lnTo>
+                    <a:pt x="1940017" y="775805"/>
+                  </a:lnTo>
+                  <a:lnTo>
+                    <a:pt x="2024365" y="775805"/>
+                  </a:lnTo>
+                  <a:lnTo>
+                    <a:pt x="2024365" y="756817"/>
+                  </a:lnTo>
+                  <a:lnTo>
+                    <a:pt x="2108714" y="756817"/>
+                  </a:lnTo>
+                  <a:lnTo>
+                    <a:pt x="2108714" y="719083"/>
+                  </a:lnTo>
+                  <a:lnTo>
+                    <a:pt x="2193062" y="719083"/>
+                  </a:lnTo>
+                  <a:lnTo>
+                    <a:pt x="2193062" y="644869"/>
+                  </a:lnTo>
+                  <a:lnTo>
+                    <a:pt x="2277411" y="644869"/>
+                  </a:lnTo>
+                  <a:lnTo>
+                    <a:pt x="2277411" y="626133"/>
+                  </a:lnTo>
+                  <a:lnTo>
+                    <a:pt x="2361760" y="626133"/>
+                  </a:lnTo>
+                  <a:lnTo>
+                    <a:pt x="2361760" y="552153"/>
+                  </a:lnTo>
+                  <a:lnTo>
+                    <a:pt x="2446108" y="552153"/>
+                  </a:lnTo>
+                  <a:lnTo>
+                    <a:pt x="2446108" y="496938"/>
+                  </a:lnTo>
+                  <a:lnTo>
+                    <a:pt x="2530457" y="496938"/>
+                  </a:lnTo>
+                  <a:lnTo>
+                    <a:pt x="2530457" y="442263"/>
+                  </a:lnTo>
+                  <a:lnTo>
+                    <a:pt x="2614805" y="442263"/>
+                  </a:lnTo>
+                  <a:lnTo>
+                    <a:pt x="2614805" y="423912"/>
+                  </a:lnTo>
+                  <a:lnTo>
+                    <a:pt x="2699154" y="423912"/>
+                  </a:lnTo>
+                  <a:lnTo>
+                    <a:pt x="2699154" y="423912"/>
+                  </a:lnTo>
+                  <a:lnTo>
+                    <a:pt x="2783503" y="423912"/>
+                  </a:lnTo>
+                  <a:lnTo>
+                    <a:pt x="2783503" y="423912"/>
+                  </a:lnTo>
+                  <a:lnTo>
+                    <a:pt x="2867851" y="423912"/>
+                  </a:lnTo>
+                  <a:lnTo>
+                    <a:pt x="2867851" y="369619"/>
+                  </a:lnTo>
+                  <a:lnTo>
+                    <a:pt x="2952200" y="369619"/>
+                  </a:lnTo>
+                  <a:lnTo>
+                    <a:pt x="2952200" y="333505"/>
+                  </a:lnTo>
+                  <a:lnTo>
+                    <a:pt x="3036548" y="333505"/>
+                  </a:lnTo>
+                  <a:lnTo>
+                    <a:pt x="3036548" y="333505"/>
+                  </a:lnTo>
+                  <a:lnTo>
+                    <a:pt x="3120897" y="333505"/>
+                  </a:lnTo>
+                  <a:lnTo>
+                    <a:pt x="3120897" y="315508"/>
+                  </a:lnTo>
+                  <a:lnTo>
+                    <a:pt x="3205245" y="315508"/>
+                  </a:lnTo>
+                  <a:lnTo>
+                    <a:pt x="3205245" y="297593"/>
+                  </a:lnTo>
+                  <a:lnTo>
+                    <a:pt x="3289594" y="297593"/>
+                  </a:lnTo>
+                  <a:lnTo>
+                    <a:pt x="3289594" y="297593"/>
+                  </a:lnTo>
+                  <a:lnTo>
+                    <a:pt x="3373943" y="297593"/>
+                  </a:lnTo>
+                  <a:lnTo>
+                    <a:pt x="3373943" y="297593"/>
+                  </a:lnTo>
+                  <a:lnTo>
+                    <a:pt x="3458291" y="297593"/>
+                  </a:lnTo>
+                  <a:lnTo>
+                    <a:pt x="3458291" y="297593"/>
+                  </a:lnTo>
+                  <a:lnTo>
+                    <a:pt x="3542640" y="297593"/>
+                  </a:lnTo>
+                  <a:lnTo>
+                    <a:pt x="3542640" y="297593"/>
+                  </a:lnTo>
+                  <a:lnTo>
+                    <a:pt x="3626988" y="297593"/>
+                  </a:lnTo>
+                  <a:lnTo>
+                    <a:pt x="3626988" y="297593"/>
+                  </a:lnTo>
+                  <a:lnTo>
+                    <a:pt x="3711337" y="297593"/>
+                  </a:lnTo>
+                  <a:lnTo>
+                    <a:pt x="3711337" y="297593"/>
+                  </a:lnTo>
+                  <a:lnTo>
+                    <a:pt x="3795685" y="297593"/>
+                  </a:lnTo>
+                  <a:lnTo>
+                    <a:pt x="3795685" y="279753"/>
+                  </a:lnTo>
+                  <a:lnTo>
+                    <a:pt x="3880034" y="279753"/>
+                  </a:lnTo>
+                  <a:lnTo>
+                    <a:pt x="3880034" y="279753"/>
+                  </a:lnTo>
+                  <a:lnTo>
+                    <a:pt x="3964383" y="279753"/>
+                  </a:lnTo>
+                  <a:lnTo>
+                    <a:pt x="3964383" y="261959"/>
+                  </a:lnTo>
+                  <a:lnTo>
+                    <a:pt x="4048731" y="261959"/>
+                  </a:lnTo>
+                  <a:lnTo>
+                    <a:pt x="4048731" y="244223"/>
+                  </a:lnTo>
+                  <a:lnTo>
+                    <a:pt x="4133080" y="244223"/>
+                  </a:lnTo>
+                  <a:lnTo>
+                    <a:pt x="4133080" y="209149"/>
+                  </a:lnTo>
+                  <a:lnTo>
+                    <a:pt x="4217428" y="209149"/>
+                  </a:lnTo>
+                  <a:lnTo>
+                    <a:pt x="4217428" y="209149"/>
+                  </a:lnTo>
+                  <a:lnTo>
+                    <a:pt x="4301777" y="209149"/>
+                  </a:lnTo>
+                  <a:lnTo>
+                    <a:pt x="4301777" y="209149"/>
+                  </a:lnTo>
+                  <a:lnTo>
+                    <a:pt x="4386125" y="209149"/>
+                  </a:lnTo>
+                  <a:lnTo>
+                    <a:pt x="4386125" y="191555"/>
+                  </a:lnTo>
+                  <a:lnTo>
+                    <a:pt x="4470474" y="191555"/>
+                  </a:lnTo>
+                  <a:lnTo>
+                    <a:pt x="4470474" y="191555"/>
+                  </a:lnTo>
+                  <a:lnTo>
+                    <a:pt x="4554823" y="191555"/>
+                  </a:lnTo>
+                  <a:lnTo>
+                    <a:pt x="4554823" y="174016"/>
+                  </a:lnTo>
+                  <a:lnTo>
+                    <a:pt x="4639171" y="174016"/>
+                  </a:lnTo>
+                  <a:lnTo>
+                    <a:pt x="4639171" y="174016"/>
+                  </a:lnTo>
+                  <a:lnTo>
+                    <a:pt x="4723520" y="174016"/>
+                  </a:lnTo>
+                  <a:lnTo>
+                    <a:pt x="4723520" y="174016"/>
+                  </a:lnTo>
+                  <a:lnTo>
+                    <a:pt x="4807868" y="174016"/>
+                  </a:lnTo>
+                  <a:lnTo>
+                    <a:pt x="4807868" y="174016"/>
+                  </a:lnTo>
+                  <a:lnTo>
+                    <a:pt x="4892217" y="174016"/>
+                  </a:lnTo>
+                  <a:lnTo>
+                    <a:pt x="4892217" y="174016"/>
+                  </a:lnTo>
+                  <a:lnTo>
+                    <a:pt x="4976565" y="174016"/>
+                  </a:lnTo>
+                  <a:lnTo>
+                    <a:pt x="4976565" y="156506"/>
+                  </a:lnTo>
+                  <a:lnTo>
+                    <a:pt x="5060914" y="156506"/>
+                  </a:lnTo>
+                  <a:lnTo>
+                    <a:pt x="5060914" y="121827"/>
+                  </a:lnTo>
+                  <a:lnTo>
+                    <a:pt x="5145263" y="121827"/>
+                  </a:lnTo>
+                  <a:lnTo>
+                    <a:pt x="5145263" y="121827"/>
+                  </a:lnTo>
+                  <a:lnTo>
+                    <a:pt x="5229611" y="121827"/>
+                  </a:lnTo>
+                  <a:lnTo>
+                    <a:pt x="5229611" y="121827"/>
+                  </a:lnTo>
+                  <a:lnTo>
+                    <a:pt x="5313960" y="121827"/>
+                  </a:lnTo>
+                  <a:lnTo>
+                    <a:pt x="5313960" y="121827"/>
+                  </a:lnTo>
+                  <a:lnTo>
+                    <a:pt x="5398308" y="121827"/>
+                  </a:lnTo>
+                  <a:lnTo>
+                    <a:pt x="5398308" y="104512"/>
+                  </a:lnTo>
+                  <a:lnTo>
+                    <a:pt x="5482657" y="104512"/>
+                  </a:lnTo>
+                  <a:lnTo>
+                    <a:pt x="5482657" y="87285"/>
+                  </a:lnTo>
+                  <a:lnTo>
+                    <a:pt x="5567006" y="87285"/>
+                  </a:lnTo>
+                  <a:lnTo>
+                    <a:pt x="5567006" y="87285"/>
+                  </a:lnTo>
+                  <a:lnTo>
+                    <a:pt x="5651354" y="87285"/>
+                  </a:lnTo>
+                  <a:lnTo>
+                    <a:pt x="5651354" y="87285"/>
+                  </a:lnTo>
+                  <a:lnTo>
+                    <a:pt x="5735703" y="87285"/>
+                  </a:lnTo>
+                  <a:lnTo>
+                    <a:pt x="5735703" y="70032"/>
+                  </a:lnTo>
+                  <a:lnTo>
+                    <a:pt x="5820051" y="70032"/>
+                  </a:lnTo>
+                  <a:lnTo>
+                    <a:pt x="5820051" y="70032"/>
+                  </a:lnTo>
+                  <a:lnTo>
+                    <a:pt x="5904400" y="70032"/>
+                  </a:lnTo>
+                  <a:lnTo>
+                    <a:pt x="5904400" y="70032"/>
+                  </a:lnTo>
+                  <a:lnTo>
+                    <a:pt x="5988748" y="70032"/>
+                  </a:lnTo>
+                  <a:lnTo>
+                    <a:pt x="5988748" y="70032"/>
+                  </a:lnTo>
+                  <a:lnTo>
+                    <a:pt x="6073097" y="70032"/>
+                  </a:lnTo>
+                  <a:lnTo>
+                    <a:pt x="6073097" y="70032"/>
+                  </a:lnTo>
+                  <a:lnTo>
+                    <a:pt x="6157446" y="70032"/>
+                  </a:lnTo>
+                  <a:lnTo>
+                    <a:pt x="6157446" y="35023"/>
+                  </a:lnTo>
+                  <a:lnTo>
+                    <a:pt x="6241794" y="35023"/>
+                  </a:lnTo>
+                  <a:lnTo>
+                    <a:pt x="6241794" y="35023"/>
+                  </a:lnTo>
+                  <a:lnTo>
+                    <a:pt x="6326143" y="35023"/>
+                  </a:lnTo>
+                  <a:lnTo>
+                    <a:pt x="6326143" y="35023"/>
+                  </a:lnTo>
+                  <a:lnTo>
+                    <a:pt x="6410491" y="35023"/>
+                  </a:lnTo>
+                  <a:lnTo>
+                    <a:pt x="6410491" y="35023"/>
+                  </a:lnTo>
+                  <a:lnTo>
+                    <a:pt x="6494840" y="35023"/>
+                  </a:lnTo>
+                  <a:lnTo>
+                    <a:pt x="6494840" y="35023"/>
+                  </a:lnTo>
+                  <a:lnTo>
+                    <a:pt x="6579188" y="35023"/>
+                  </a:lnTo>
+                  <a:lnTo>
+                    <a:pt x="6579188" y="35023"/>
+                  </a:lnTo>
+                  <a:lnTo>
+                    <a:pt x="6663537" y="35023"/>
+                  </a:lnTo>
+                  <a:lnTo>
+                    <a:pt x="6663537" y="35023"/>
+                  </a:lnTo>
+                  <a:lnTo>
+                    <a:pt x="6747886" y="35023"/>
+                  </a:lnTo>
+                  <a:lnTo>
+                    <a:pt x="6747886" y="17470"/>
+                  </a:lnTo>
+                  <a:lnTo>
+                    <a:pt x="6832234" y="17470"/>
+                  </a:lnTo>
+                  <a:lnTo>
+                    <a:pt x="6832234" y="17470"/>
+                  </a:lnTo>
+                  <a:lnTo>
+                    <a:pt x="6916583" y="17470"/>
+                  </a:lnTo>
+                  <a:lnTo>
+                    <a:pt x="6916583" y="17470"/>
+                  </a:lnTo>
+                  <a:lnTo>
+                    <a:pt x="7000931" y="17470"/>
+                  </a:lnTo>
+                  <a:lnTo>
+                    <a:pt x="7000931" y="17470"/>
+                  </a:lnTo>
+                  <a:lnTo>
+                    <a:pt x="7085280" y="17470"/>
+                  </a:lnTo>
+                  <a:lnTo>
+                    <a:pt x="7085280" y="17470"/>
+                  </a:lnTo>
+                  <a:lnTo>
+                    <a:pt x="7169628" y="17470"/>
+                  </a:lnTo>
+                  <a:lnTo>
+                    <a:pt x="7169628" y="17470"/>
+                  </a:lnTo>
+                  <a:lnTo>
+                    <a:pt x="7253977" y="17470"/>
                   </a:lnTo>
                   <a:lnTo>
                     <a:pt x="7253977" y="0"/>
@@ -3531,528 +3531,528 @@
           </p:nvSpPr>
           <p:spPr>
             <a:xfrm>
-              <a:off x="1019512" y="3208038"/>
-              <a:ext cx="7591371" cy="1856857"/>
+              <a:off x="1019512" y="3696228"/>
+              <a:ext cx="7591371" cy="1368667"/>
             </a:xfrm>
             <a:custGeom>
               <a:avLst/>
               <a:pathLst>
-                <a:path w="7591371" h="1856857">
+                <a:path w="7591371" h="1368667">
                   <a:moveTo>
-                    <a:pt x="0" y="1856857"/>
+                    <a:pt x="0" y="1368667"/>
                   </a:moveTo>
                   <a:lnTo>
-                    <a:pt x="84348" y="1856857"/>
-                  </a:lnTo>
-                  <a:lnTo>
-                    <a:pt x="84348" y="1817143"/>
-                  </a:lnTo>
-                  <a:lnTo>
-                    <a:pt x="168697" y="1817143"/>
-                  </a:lnTo>
-                  <a:lnTo>
-                    <a:pt x="168697" y="1777584"/>
-                  </a:lnTo>
-                  <a:lnTo>
-                    <a:pt x="253045" y="1777584"/>
-                  </a:lnTo>
-                  <a:lnTo>
-                    <a:pt x="253045" y="1738034"/>
-                  </a:lnTo>
-                  <a:lnTo>
-                    <a:pt x="337394" y="1738034"/>
-                  </a:lnTo>
-                  <a:lnTo>
-                    <a:pt x="337394" y="1718133"/>
-                  </a:lnTo>
-                  <a:lnTo>
-                    <a:pt x="421742" y="1718133"/>
-                  </a:lnTo>
-                  <a:lnTo>
-                    <a:pt x="421742" y="1678558"/>
-                  </a:lnTo>
-                  <a:lnTo>
-                    <a:pt x="506091" y="1678558"/>
-                  </a:lnTo>
-                  <a:lnTo>
-                    <a:pt x="506091" y="1639181"/>
-                  </a:lnTo>
-                  <a:lnTo>
-                    <a:pt x="590440" y="1639181"/>
-                  </a:lnTo>
-                  <a:lnTo>
-                    <a:pt x="590440" y="1580531"/>
-                  </a:lnTo>
-                  <a:lnTo>
-                    <a:pt x="674788" y="1580531"/>
-                  </a:lnTo>
-                  <a:lnTo>
-                    <a:pt x="674788" y="1560874"/>
-                  </a:lnTo>
-                  <a:lnTo>
-                    <a:pt x="759137" y="1560874"/>
-                  </a:lnTo>
-                  <a:lnTo>
-                    <a:pt x="759137" y="1464203"/>
-                  </a:lnTo>
-                  <a:lnTo>
-                    <a:pt x="843485" y="1464203"/>
-                  </a:lnTo>
-                  <a:lnTo>
-                    <a:pt x="843485" y="1405944"/>
-                  </a:lnTo>
-                  <a:lnTo>
-                    <a:pt x="927834" y="1405944"/>
-                  </a:lnTo>
-                  <a:lnTo>
-                    <a:pt x="927834" y="1328752"/>
-                  </a:lnTo>
-                  <a:lnTo>
-                    <a:pt x="1012182" y="1328752"/>
-                  </a:lnTo>
-                  <a:lnTo>
-                    <a:pt x="1012182" y="1196180"/>
-                  </a:lnTo>
-                  <a:lnTo>
-                    <a:pt x="1096531" y="1196180"/>
-                  </a:lnTo>
-                  <a:lnTo>
-                    <a:pt x="1096531" y="1138459"/>
-                  </a:lnTo>
-                  <a:lnTo>
-                    <a:pt x="1180880" y="1138459"/>
-                  </a:lnTo>
-                  <a:lnTo>
-                    <a:pt x="1180880" y="1099723"/>
-                  </a:lnTo>
-                  <a:lnTo>
-                    <a:pt x="1265228" y="1099723"/>
-                  </a:lnTo>
-                  <a:lnTo>
-                    <a:pt x="1265228" y="1042295"/>
-                  </a:lnTo>
-                  <a:lnTo>
-                    <a:pt x="1349577" y="1042295"/>
-                  </a:lnTo>
-                  <a:lnTo>
-                    <a:pt x="1349577" y="1003824"/>
-                  </a:lnTo>
-                  <a:lnTo>
-                    <a:pt x="1433925" y="1003824"/>
-                  </a:lnTo>
-                  <a:lnTo>
-                    <a:pt x="1433925" y="965469"/>
-                  </a:lnTo>
-                  <a:lnTo>
-                    <a:pt x="1518274" y="965469"/>
-                  </a:lnTo>
-                  <a:lnTo>
-                    <a:pt x="1518274" y="889703"/>
-                  </a:lnTo>
-                  <a:lnTo>
-                    <a:pt x="1602622" y="889703"/>
-                  </a:lnTo>
-                  <a:lnTo>
-                    <a:pt x="1602622" y="870642"/>
-                  </a:lnTo>
-                  <a:lnTo>
-                    <a:pt x="1686971" y="870642"/>
-                  </a:lnTo>
-                  <a:lnTo>
-                    <a:pt x="1686971" y="851667"/>
-                  </a:lnTo>
-                  <a:lnTo>
-                    <a:pt x="1771320" y="851667"/>
-                  </a:lnTo>
-                  <a:lnTo>
-                    <a:pt x="1771320" y="851667"/>
-                  </a:lnTo>
-                  <a:lnTo>
-                    <a:pt x="1855668" y="851667"/>
-                  </a:lnTo>
-                  <a:lnTo>
-                    <a:pt x="1855668" y="775805"/>
-                  </a:lnTo>
-                  <a:lnTo>
-                    <a:pt x="1940017" y="775805"/>
-                  </a:lnTo>
-                  <a:lnTo>
-                    <a:pt x="1940017" y="775805"/>
-                  </a:lnTo>
-                  <a:lnTo>
-                    <a:pt x="2024365" y="775805"/>
-                  </a:lnTo>
-                  <a:lnTo>
-                    <a:pt x="2024365" y="756817"/>
-                  </a:lnTo>
-                  <a:lnTo>
-                    <a:pt x="2108714" y="756817"/>
-                  </a:lnTo>
-                  <a:lnTo>
-                    <a:pt x="2108714" y="719083"/>
-                  </a:lnTo>
-                  <a:lnTo>
-                    <a:pt x="2193062" y="719083"/>
-                  </a:lnTo>
-                  <a:lnTo>
-                    <a:pt x="2193062" y="644869"/>
-                  </a:lnTo>
-                  <a:lnTo>
-                    <a:pt x="2277411" y="644869"/>
-                  </a:lnTo>
-                  <a:lnTo>
-                    <a:pt x="2277411" y="626133"/>
-                  </a:lnTo>
-                  <a:lnTo>
-                    <a:pt x="2361760" y="626133"/>
-                  </a:lnTo>
-                  <a:lnTo>
-                    <a:pt x="2361760" y="552153"/>
-                  </a:lnTo>
-                  <a:lnTo>
-                    <a:pt x="2446108" y="552153"/>
-                  </a:lnTo>
-                  <a:lnTo>
-                    <a:pt x="2446108" y="496938"/>
-                  </a:lnTo>
-                  <a:lnTo>
-                    <a:pt x="2530457" y="496938"/>
-                  </a:lnTo>
-                  <a:lnTo>
-                    <a:pt x="2530457" y="442263"/>
-                  </a:lnTo>
-                  <a:lnTo>
-                    <a:pt x="2614805" y="442263"/>
-                  </a:lnTo>
-                  <a:lnTo>
-                    <a:pt x="2614805" y="423912"/>
-                  </a:lnTo>
-                  <a:lnTo>
-                    <a:pt x="2699154" y="423912"/>
-                  </a:lnTo>
-                  <a:lnTo>
-                    <a:pt x="2699154" y="423912"/>
-                  </a:lnTo>
-                  <a:lnTo>
-                    <a:pt x="2783503" y="423912"/>
-                  </a:lnTo>
-                  <a:lnTo>
-                    <a:pt x="2783503" y="423912"/>
-                  </a:lnTo>
-                  <a:lnTo>
-                    <a:pt x="2867851" y="423912"/>
-                  </a:lnTo>
-                  <a:lnTo>
-                    <a:pt x="2867851" y="369619"/>
-                  </a:lnTo>
-                  <a:lnTo>
-                    <a:pt x="2952200" y="369619"/>
-                  </a:lnTo>
-                  <a:lnTo>
-                    <a:pt x="2952200" y="333505"/>
-                  </a:lnTo>
-                  <a:lnTo>
-                    <a:pt x="3036548" y="333505"/>
-                  </a:lnTo>
-                  <a:lnTo>
-                    <a:pt x="3036548" y="333505"/>
-                  </a:lnTo>
-                  <a:lnTo>
-                    <a:pt x="3120897" y="333505"/>
-                  </a:lnTo>
-                  <a:lnTo>
-                    <a:pt x="3120897" y="315508"/>
-                  </a:lnTo>
-                  <a:lnTo>
-                    <a:pt x="3205245" y="315508"/>
-                  </a:lnTo>
-                  <a:lnTo>
-                    <a:pt x="3205245" y="297593"/>
-                  </a:lnTo>
-                  <a:lnTo>
-                    <a:pt x="3289594" y="297593"/>
-                  </a:lnTo>
-                  <a:lnTo>
-                    <a:pt x="3289594" y="297593"/>
-                  </a:lnTo>
-                  <a:lnTo>
-                    <a:pt x="3373943" y="297593"/>
-                  </a:lnTo>
-                  <a:lnTo>
-                    <a:pt x="3373943" y="297593"/>
-                  </a:lnTo>
-                  <a:lnTo>
-                    <a:pt x="3458291" y="297593"/>
-                  </a:lnTo>
-                  <a:lnTo>
-                    <a:pt x="3458291" y="297593"/>
-                  </a:lnTo>
-                  <a:lnTo>
-                    <a:pt x="3542640" y="297593"/>
-                  </a:lnTo>
-                  <a:lnTo>
-                    <a:pt x="3542640" y="297593"/>
-                  </a:lnTo>
-                  <a:lnTo>
-                    <a:pt x="3626988" y="297593"/>
-                  </a:lnTo>
-                  <a:lnTo>
-                    <a:pt x="3626988" y="297593"/>
-                  </a:lnTo>
-                  <a:lnTo>
-                    <a:pt x="3711337" y="297593"/>
-                  </a:lnTo>
-                  <a:lnTo>
-                    <a:pt x="3711337" y="297593"/>
-                  </a:lnTo>
-                  <a:lnTo>
-                    <a:pt x="3795685" y="297593"/>
-                  </a:lnTo>
-                  <a:lnTo>
-                    <a:pt x="3795685" y="279753"/>
-                  </a:lnTo>
-                  <a:lnTo>
-                    <a:pt x="3880034" y="279753"/>
-                  </a:lnTo>
-                  <a:lnTo>
-                    <a:pt x="3880034" y="279753"/>
-                  </a:lnTo>
-                  <a:lnTo>
-                    <a:pt x="3964383" y="279753"/>
-                  </a:lnTo>
-                  <a:lnTo>
-                    <a:pt x="3964383" y="261959"/>
-                  </a:lnTo>
-                  <a:lnTo>
-                    <a:pt x="4048731" y="261959"/>
-                  </a:lnTo>
-                  <a:lnTo>
-                    <a:pt x="4048731" y="244223"/>
-                  </a:lnTo>
-                  <a:lnTo>
-                    <a:pt x="4133080" y="244223"/>
-                  </a:lnTo>
-                  <a:lnTo>
-                    <a:pt x="4133080" y="209149"/>
-                  </a:lnTo>
-                  <a:lnTo>
-                    <a:pt x="4217428" y="209149"/>
-                  </a:lnTo>
-                  <a:lnTo>
-                    <a:pt x="4217428" y="209149"/>
-                  </a:lnTo>
-                  <a:lnTo>
-                    <a:pt x="4301777" y="209149"/>
-                  </a:lnTo>
-                  <a:lnTo>
-                    <a:pt x="4301777" y="209149"/>
-                  </a:lnTo>
-                  <a:lnTo>
-                    <a:pt x="4386125" y="209149"/>
-                  </a:lnTo>
-                  <a:lnTo>
-                    <a:pt x="4386125" y="191555"/>
-                  </a:lnTo>
-                  <a:lnTo>
-                    <a:pt x="4470474" y="191555"/>
-                  </a:lnTo>
-                  <a:lnTo>
-                    <a:pt x="4470474" y="191555"/>
-                  </a:lnTo>
-                  <a:lnTo>
-                    <a:pt x="4554823" y="191555"/>
-                  </a:lnTo>
-                  <a:lnTo>
-                    <a:pt x="4554823" y="174016"/>
-                  </a:lnTo>
-                  <a:lnTo>
-                    <a:pt x="4639171" y="174016"/>
-                  </a:lnTo>
-                  <a:lnTo>
-                    <a:pt x="4639171" y="174016"/>
-                  </a:lnTo>
-                  <a:lnTo>
-                    <a:pt x="4723520" y="174016"/>
-                  </a:lnTo>
-                  <a:lnTo>
-                    <a:pt x="4723520" y="174016"/>
-                  </a:lnTo>
-                  <a:lnTo>
-                    <a:pt x="4807868" y="174016"/>
-                  </a:lnTo>
-                  <a:lnTo>
-                    <a:pt x="4807868" y="174016"/>
-                  </a:lnTo>
-                  <a:lnTo>
-                    <a:pt x="4892217" y="174016"/>
-                  </a:lnTo>
-                  <a:lnTo>
-                    <a:pt x="4892217" y="174016"/>
-                  </a:lnTo>
-                  <a:lnTo>
-                    <a:pt x="4976565" y="174016"/>
-                  </a:lnTo>
-                  <a:lnTo>
-                    <a:pt x="4976565" y="156506"/>
-                  </a:lnTo>
-                  <a:lnTo>
-                    <a:pt x="5060914" y="156506"/>
-                  </a:lnTo>
-                  <a:lnTo>
-                    <a:pt x="5060914" y="121827"/>
-                  </a:lnTo>
-                  <a:lnTo>
-                    <a:pt x="5145263" y="121827"/>
-                  </a:lnTo>
-                  <a:lnTo>
-                    <a:pt x="5145263" y="121827"/>
-                  </a:lnTo>
-                  <a:lnTo>
-                    <a:pt x="5229611" y="121827"/>
-                  </a:lnTo>
-                  <a:lnTo>
-                    <a:pt x="5229611" y="121827"/>
-                  </a:lnTo>
-                  <a:lnTo>
-                    <a:pt x="5313960" y="121827"/>
-                  </a:lnTo>
-                  <a:lnTo>
-                    <a:pt x="5313960" y="121827"/>
-                  </a:lnTo>
-                  <a:lnTo>
-                    <a:pt x="5398308" y="121827"/>
-                  </a:lnTo>
-                  <a:lnTo>
-                    <a:pt x="5398308" y="104512"/>
-                  </a:lnTo>
-                  <a:lnTo>
-                    <a:pt x="5482657" y="104512"/>
-                  </a:lnTo>
-                  <a:lnTo>
-                    <a:pt x="5482657" y="87285"/>
-                  </a:lnTo>
-                  <a:lnTo>
-                    <a:pt x="5567006" y="87285"/>
-                  </a:lnTo>
-                  <a:lnTo>
-                    <a:pt x="5567006" y="87285"/>
-                  </a:lnTo>
-                  <a:lnTo>
-                    <a:pt x="5651354" y="87285"/>
-                  </a:lnTo>
-                  <a:lnTo>
-                    <a:pt x="5651354" y="87285"/>
-                  </a:lnTo>
-                  <a:lnTo>
-                    <a:pt x="5735703" y="87285"/>
-                  </a:lnTo>
-                  <a:lnTo>
-                    <a:pt x="5735703" y="70032"/>
-                  </a:lnTo>
-                  <a:lnTo>
-                    <a:pt x="5820051" y="70032"/>
-                  </a:lnTo>
-                  <a:lnTo>
-                    <a:pt x="5820051" y="70032"/>
-                  </a:lnTo>
-                  <a:lnTo>
-                    <a:pt x="5904400" y="70032"/>
-                  </a:lnTo>
-                  <a:lnTo>
-                    <a:pt x="5904400" y="70032"/>
-                  </a:lnTo>
-                  <a:lnTo>
-                    <a:pt x="5988748" y="70032"/>
-                  </a:lnTo>
-                  <a:lnTo>
-                    <a:pt x="5988748" y="70032"/>
-                  </a:lnTo>
-                  <a:lnTo>
-                    <a:pt x="6073097" y="70032"/>
-                  </a:lnTo>
-                  <a:lnTo>
-                    <a:pt x="6073097" y="70032"/>
-                  </a:lnTo>
-                  <a:lnTo>
-                    <a:pt x="6157446" y="70032"/>
-                  </a:lnTo>
-                  <a:lnTo>
-                    <a:pt x="6157446" y="35023"/>
-                  </a:lnTo>
-                  <a:lnTo>
-                    <a:pt x="6241794" y="35023"/>
-                  </a:lnTo>
-                  <a:lnTo>
-                    <a:pt x="6241794" y="35023"/>
-                  </a:lnTo>
-                  <a:lnTo>
-                    <a:pt x="6326143" y="35023"/>
-                  </a:lnTo>
-                  <a:lnTo>
-                    <a:pt x="6326143" y="35023"/>
-                  </a:lnTo>
-                  <a:lnTo>
-                    <a:pt x="6410491" y="35023"/>
-                  </a:lnTo>
-                  <a:lnTo>
-                    <a:pt x="6410491" y="35023"/>
-                  </a:lnTo>
-                  <a:lnTo>
-                    <a:pt x="6494840" y="35023"/>
-                  </a:lnTo>
-                  <a:lnTo>
-                    <a:pt x="6494840" y="35023"/>
-                  </a:lnTo>
-                  <a:lnTo>
-                    <a:pt x="6579188" y="35023"/>
-                  </a:lnTo>
-                  <a:lnTo>
-                    <a:pt x="6579188" y="35023"/>
-                  </a:lnTo>
-                  <a:lnTo>
-                    <a:pt x="6663537" y="35023"/>
-                  </a:lnTo>
-                  <a:lnTo>
-                    <a:pt x="6663537" y="35023"/>
-                  </a:lnTo>
-                  <a:lnTo>
-                    <a:pt x="6747886" y="35023"/>
-                  </a:lnTo>
-                  <a:lnTo>
-                    <a:pt x="6747886" y="17470"/>
-                  </a:lnTo>
-                  <a:lnTo>
-                    <a:pt x="6832234" y="17470"/>
-                  </a:lnTo>
-                  <a:lnTo>
-                    <a:pt x="6832234" y="17470"/>
-                  </a:lnTo>
-                  <a:lnTo>
-                    <a:pt x="6916583" y="17470"/>
-                  </a:lnTo>
-                  <a:lnTo>
-                    <a:pt x="6916583" y="17470"/>
-                  </a:lnTo>
-                  <a:lnTo>
-                    <a:pt x="7000931" y="17470"/>
-                  </a:lnTo>
-                  <a:lnTo>
-                    <a:pt x="7000931" y="17470"/>
-                  </a:lnTo>
-                  <a:lnTo>
-                    <a:pt x="7085280" y="17470"/>
-                  </a:lnTo>
-                  <a:lnTo>
-                    <a:pt x="7085280" y="17470"/>
-                  </a:lnTo>
-                  <a:lnTo>
-                    <a:pt x="7169628" y="17470"/>
-                  </a:lnTo>
-                  <a:lnTo>
-                    <a:pt x="7169628" y="17470"/>
-                  </a:lnTo>
-                  <a:lnTo>
-                    <a:pt x="7253977" y="17470"/>
+                    <a:pt x="84348" y="1368667"/>
+                  </a:lnTo>
+                  <a:lnTo>
+                    <a:pt x="84348" y="1342830"/>
+                  </a:lnTo>
+                  <a:lnTo>
+                    <a:pt x="168697" y="1342830"/>
+                  </a:lnTo>
+                  <a:lnTo>
+                    <a:pt x="168697" y="1316984"/>
+                  </a:lnTo>
+                  <a:lnTo>
+                    <a:pt x="253045" y="1316984"/>
+                  </a:lnTo>
+                  <a:lnTo>
+                    <a:pt x="253045" y="1291034"/>
+                  </a:lnTo>
+                  <a:lnTo>
+                    <a:pt x="337394" y="1291034"/>
+                  </a:lnTo>
+                  <a:lnTo>
+                    <a:pt x="337394" y="1277935"/>
+                  </a:lnTo>
+                  <a:lnTo>
+                    <a:pt x="421742" y="1277935"/>
+                  </a:lnTo>
+                  <a:lnTo>
+                    <a:pt x="421742" y="1251798"/>
+                  </a:lnTo>
+                  <a:lnTo>
+                    <a:pt x="506091" y="1251798"/>
+                  </a:lnTo>
+                  <a:lnTo>
+                    <a:pt x="506091" y="1225679"/>
+                  </a:lnTo>
+                  <a:lnTo>
+                    <a:pt x="590440" y="1225679"/>
+                  </a:lnTo>
+                  <a:lnTo>
+                    <a:pt x="590440" y="1186560"/>
+                  </a:lnTo>
+                  <a:lnTo>
+                    <a:pt x="674788" y="1186560"/>
+                  </a:lnTo>
+                  <a:lnTo>
+                    <a:pt x="674788" y="1173390"/>
+                  </a:lnTo>
+                  <a:lnTo>
+                    <a:pt x="759137" y="1173390"/>
+                  </a:lnTo>
+                  <a:lnTo>
+                    <a:pt x="759137" y="1108182"/>
+                  </a:lnTo>
+                  <a:lnTo>
+                    <a:pt x="843485" y="1108182"/>
+                  </a:lnTo>
+                  <a:lnTo>
+                    <a:pt x="843485" y="1068521"/>
+                  </a:lnTo>
+                  <a:lnTo>
+                    <a:pt x="927834" y="1068521"/>
+                  </a:lnTo>
+                  <a:lnTo>
+                    <a:pt x="927834" y="1015534"/>
+                  </a:lnTo>
+                  <a:lnTo>
+                    <a:pt x="1012182" y="1015534"/>
+                  </a:lnTo>
+                  <a:lnTo>
+                    <a:pt x="1012182" y="923324"/>
+                  </a:lnTo>
+                  <a:lnTo>
+                    <a:pt x="1096531" y="923324"/>
+                  </a:lnTo>
+                  <a:lnTo>
+                    <a:pt x="1096531" y="882677"/>
+                  </a:lnTo>
+                  <a:lnTo>
+                    <a:pt x="1180880" y="882677"/>
+                  </a:lnTo>
+                  <a:lnTo>
+                    <a:pt x="1180880" y="855223"/>
+                  </a:lnTo>
+                  <a:lnTo>
+                    <a:pt x="1265228" y="855223"/>
+                  </a:lnTo>
+                  <a:lnTo>
+                    <a:pt x="1265228" y="814252"/>
+                  </a:lnTo>
+                  <a:lnTo>
+                    <a:pt x="1349577" y="814252"/>
+                  </a:lnTo>
+                  <a:lnTo>
+                    <a:pt x="1349577" y="786622"/>
+                  </a:lnTo>
+                  <a:lnTo>
+                    <a:pt x="1433925" y="786622"/>
+                  </a:lnTo>
+                  <a:lnTo>
+                    <a:pt x="1433925" y="758926"/>
+                  </a:lnTo>
+                  <a:lnTo>
+                    <a:pt x="1518274" y="758926"/>
+                  </a:lnTo>
+                  <a:lnTo>
+                    <a:pt x="1518274" y="703762"/>
+                  </a:lnTo>
+                  <a:lnTo>
+                    <a:pt x="1602622" y="703762"/>
+                  </a:lnTo>
+                  <a:lnTo>
+                    <a:pt x="1602622" y="689787"/>
+                  </a:lnTo>
+                  <a:lnTo>
+                    <a:pt x="1686971" y="689787"/>
+                  </a:lnTo>
+                  <a:lnTo>
+                    <a:pt x="1686971" y="675836"/>
+                  </a:lnTo>
+                  <a:lnTo>
+                    <a:pt x="1771320" y="675836"/>
+                  </a:lnTo>
+                  <a:lnTo>
+                    <a:pt x="1771320" y="675836"/>
+                  </a:lnTo>
+                  <a:lnTo>
+                    <a:pt x="1855668" y="675836"/>
+                  </a:lnTo>
+                  <a:lnTo>
+                    <a:pt x="1855668" y="619655"/>
+                  </a:lnTo>
+                  <a:lnTo>
+                    <a:pt x="1940017" y="619655"/>
+                  </a:lnTo>
+                  <a:lnTo>
+                    <a:pt x="1940017" y="619655"/>
+                  </a:lnTo>
+                  <a:lnTo>
+                    <a:pt x="2024365" y="619655"/>
+                  </a:lnTo>
+                  <a:lnTo>
+                    <a:pt x="2024365" y="605489"/>
+                  </a:lnTo>
+                  <a:lnTo>
+                    <a:pt x="2108714" y="605489"/>
+                  </a:lnTo>
+                  <a:lnTo>
+                    <a:pt x="2108714" y="577214"/>
+                  </a:lnTo>
+                  <a:lnTo>
+                    <a:pt x="2193062" y="577214"/>
+                  </a:lnTo>
+                  <a:lnTo>
+                    <a:pt x="2193062" y="521098"/>
+                  </a:lnTo>
+                  <a:lnTo>
+                    <a:pt x="2277411" y="521098"/>
+                  </a:lnTo>
+                  <a:lnTo>
+                    <a:pt x="2277411" y="506823"/>
+                  </a:lnTo>
+                  <a:lnTo>
+                    <a:pt x="2361760" y="506823"/>
+                  </a:lnTo>
+                  <a:lnTo>
+                    <a:pt x="2361760" y="450016"/>
+                  </a:lnTo>
+                  <a:lnTo>
+                    <a:pt x="2446108" y="450016"/>
+                  </a:lnTo>
+                  <a:lnTo>
+                    <a:pt x="2446108" y="407143"/>
+                  </a:lnTo>
+                  <a:lnTo>
+                    <a:pt x="2530457" y="407143"/>
+                  </a:lnTo>
+                  <a:lnTo>
+                    <a:pt x="2530457" y="364273"/>
+                  </a:lnTo>
+                  <a:lnTo>
+                    <a:pt x="2614805" y="364273"/>
+                  </a:lnTo>
+                  <a:lnTo>
+                    <a:pt x="2614805" y="349789"/>
+                  </a:lnTo>
+                  <a:lnTo>
+                    <a:pt x="2699154" y="349789"/>
+                  </a:lnTo>
+                  <a:lnTo>
+                    <a:pt x="2699154" y="349789"/>
+                  </a:lnTo>
+                  <a:lnTo>
+                    <a:pt x="2783503" y="349789"/>
+                  </a:lnTo>
+                  <a:lnTo>
+                    <a:pt x="2783503" y="349789"/>
+                  </a:lnTo>
+                  <a:lnTo>
+                    <a:pt x="2867851" y="349789"/>
+                  </a:lnTo>
+                  <a:lnTo>
+                    <a:pt x="2867851" y="306644"/>
+                  </a:lnTo>
+                  <a:lnTo>
+                    <a:pt x="2952200" y="306644"/>
+                  </a:lnTo>
+                  <a:lnTo>
+                    <a:pt x="2952200" y="277700"/>
+                  </a:lnTo>
+                  <a:lnTo>
+                    <a:pt x="3036548" y="277700"/>
+                  </a:lnTo>
+                  <a:lnTo>
+                    <a:pt x="3036548" y="277700"/>
+                  </a:lnTo>
+                  <a:lnTo>
+                    <a:pt x="3120897" y="277700"/>
+                  </a:lnTo>
+                  <a:lnTo>
+                    <a:pt x="3120897" y="263200"/>
+                  </a:lnTo>
+                  <a:lnTo>
+                    <a:pt x="3205245" y="263200"/>
+                  </a:lnTo>
+                  <a:lnTo>
+                    <a:pt x="3205245" y="248715"/>
+                  </a:lnTo>
+                  <a:lnTo>
+                    <a:pt x="3289594" y="248715"/>
+                  </a:lnTo>
+                  <a:lnTo>
+                    <a:pt x="3289594" y="248715"/>
+                  </a:lnTo>
+                  <a:lnTo>
+                    <a:pt x="3373943" y="248715"/>
+                  </a:lnTo>
+                  <a:lnTo>
+                    <a:pt x="3373943" y="248715"/>
+                  </a:lnTo>
+                  <a:lnTo>
+                    <a:pt x="3458291" y="248715"/>
+                  </a:lnTo>
+                  <a:lnTo>
+                    <a:pt x="3458291" y="248715"/>
+                  </a:lnTo>
+                  <a:lnTo>
+                    <a:pt x="3542640" y="248715"/>
+                  </a:lnTo>
+                  <a:lnTo>
+                    <a:pt x="3542640" y="248715"/>
+                  </a:lnTo>
+                  <a:lnTo>
+                    <a:pt x="3626988" y="248715"/>
+                  </a:lnTo>
+                  <a:lnTo>
+                    <a:pt x="3626988" y="248715"/>
+                  </a:lnTo>
+                  <a:lnTo>
+                    <a:pt x="3711337" y="248715"/>
+                  </a:lnTo>
+                  <a:lnTo>
+                    <a:pt x="3711337" y="248715"/>
+                  </a:lnTo>
+                  <a:lnTo>
+                    <a:pt x="3795685" y="248715"/>
+                  </a:lnTo>
+                  <a:lnTo>
+                    <a:pt x="3795685" y="234241"/>
+                  </a:lnTo>
+                  <a:lnTo>
+                    <a:pt x="3880034" y="234241"/>
+                  </a:lnTo>
+                  <a:lnTo>
+                    <a:pt x="3880034" y="234241"/>
+                  </a:lnTo>
+                  <a:lnTo>
+                    <a:pt x="3964383" y="234241"/>
+                  </a:lnTo>
+                  <a:lnTo>
+                    <a:pt x="3964383" y="219752"/>
+                  </a:lnTo>
+                  <a:lnTo>
+                    <a:pt x="4048731" y="219752"/>
+                  </a:lnTo>
+                  <a:lnTo>
+                    <a:pt x="4048731" y="205258"/>
+                  </a:lnTo>
+                  <a:lnTo>
+                    <a:pt x="4133080" y="205258"/>
+                  </a:lnTo>
+                  <a:lnTo>
+                    <a:pt x="4133080" y="176441"/>
+                  </a:lnTo>
+                  <a:lnTo>
+                    <a:pt x="4217428" y="176441"/>
+                  </a:lnTo>
+                  <a:lnTo>
+                    <a:pt x="4217428" y="176441"/>
+                  </a:lnTo>
+                  <a:lnTo>
+                    <a:pt x="4301777" y="176441"/>
+                  </a:lnTo>
+                  <a:lnTo>
+                    <a:pt x="4301777" y="176441"/>
+                  </a:lnTo>
+                  <a:lnTo>
+                    <a:pt x="4386125" y="176441"/>
+                  </a:lnTo>
+                  <a:lnTo>
+                    <a:pt x="4386125" y="161906"/>
+                  </a:lnTo>
+                  <a:lnTo>
+                    <a:pt x="4470474" y="161906"/>
+                  </a:lnTo>
+                  <a:lnTo>
+                    <a:pt x="4470474" y="161906"/>
+                  </a:lnTo>
+                  <a:lnTo>
+                    <a:pt x="4554823" y="161906"/>
+                  </a:lnTo>
+                  <a:lnTo>
+                    <a:pt x="4554823" y="147364"/>
+                  </a:lnTo>
+                  <a:lnTo>
+                    <a:pt x="4639171" y="147364"/>
+                  </a:lnTo>
+                  <a:lnTo>
+                    <a:pt x="4639171" y="147364"/>
+                  </a:lnTo>
+                  <a:lnTo>
+                    <a:pt x="4723520" y="147364"/>
+                  </a:lnTo>
+                  <a:lnTo>
+                    <a:pt x="4723520" y="147364"/>
+                  </a:lnTo>
+                  <a:lnTo>
+                    <a:pt x="4807868" y="147364"/>
+                  </a:lnTo>
+                  <a:lnTo>
+                    <a:pt x="4807868" y="147364"/>
+                  </a:lnTo>
+                  <a:lnTo>
+                    <a:pt x="4892217" y="147364"/>
+                  </a:lnTo>
+                  <a:lnTo>
+                    <a:pt x="4892217" y="147364"/>
+                  </a:lnTo>
+                  <a:lnTo>
+                    <a:pt x="4976565" y="147364"/>
+                  </a:lnTo>
+                  <a:lnTo>
+                    <a:pt x="4976565" y="132791"/>
+                  </a:lnTo>
+                  <a:lnTo>
+                    <a:pt x="5060914" y="132791"/>
+                  </a:lnTo>
+                  <a:lnTo>
+                    <a:pt x="5060914" y="103766"/>
+                  </a:lnTo>
+                  <a:lnTo>
+                    <a:pt x="5145263" y="103766"/>
+                  </a:lnTo>
+                  <a:lnTo>
+                    <a:pt x="5145263" y="103766"/>
+                  </a:lnTo>
+                  <a:lnTo>
+                    <a:pt x="5229611" y="103766"/>
+                  </a:lnTo>
+                  <a:lnTo>
+                    <a:pt x="5229611" y="103766"/>
+                  </a:lnTo>
+                  <a:lnTo>
+                    <a:pt x="5313960" y="103766"/>
+                  </a:lnTo>
+                  <a:lnTo>
+                    <a:pt x="5313960" y="103766"/>
+                  </a:lnTo>
+                  <a:lnTo>
+                    <a:pt x="5398308" y="103766"/>
+                  </a:lnTo>
+                  <a:lnTo>
+                    <a:pt x="5398308" y="89192"/>
+                  </a:lnTo>
+                  <a:lnTo>
+                    <a:pt x="5482657" y="89192"/>
+                  </a:lnTo>
+                  <a:lnTo>
+                    <a:pt x="5482657" y="74635"/>
+                  </a:lnTo>
+                  <a:lnTo>
+                    <a:pt x="5567006" y="74635"/>
+                  </a:lnTo>
+                  <a:lnTo>
+                    <a:pt x="5567006" y="74635"/>
+                  </a:lnTo>
+                  <a:lnTo>
+                    <a:pt x="5651354" y="74635"/>
+                  </a:lnTo>
+                  <a:lnTo>
+                    <a:pt x="5651354" y="74635"/>
+                  </a:lnTo>
+                  <a:lnTo>
+                    <a:pt x="5735703" y="74635"/>
+                  </a:lnTo>
+                  <a:lnTo>
+                    <a:pt x="5735703" y="60001"/>
+                  </a:lnTo>
+                  <a:lnTo>
+                    <a:pt x="5820051" y="60001"/>
+                  </a:lnTo>
+                  <a:lnTo>
+                    <a:pt x="5820051" y="60001"/>
+                  </a:lnTo>
+                  <a:lnTo>
+                    <a:pt x="5904400" y="60001"/>
+                  </a:lnTo>
+                  <a:lnTo>
+                    <a:pt x="5904400" y="60001"/>
+                  </a:lnTo>
+                  <a:lnTo>
+                    <a:pt x="5988748" y="60001"/>
+                  </a:lnTo>
+                  <a:lnTo>
+                    <a:pt x="5988748" y="60001"/>
+                  </a:lnTo>
+                  <a:lnTo>
+                    <a:pt x="6073097" y="60001"/>
+                  </a:lnTo>
+                  <a:lnTo>
+                    <a:pt x="6073097" y="60001"/>
+                  </a:lnTo>
+                  <a:lnTo>
+                    <a:pt x="6157446" y="60001"/>
+                  </a:lnTo>
+                  <a:lnTo>
+                    <a:pt x="6157446" y="30129"/>
+                  </a:lnTo>
+                  <a:lnTo>
+                    <a:pt x="6241794" y="30129"/>
+                  </a:lnTo>
+                  <a:lnTo>
+                    <a:pt x="6241794" y="30129"/>
+                  </a:lnTo>
+                  <a:lnTo>
+                    <a:pt x="6326143" y="30129"/>
+                  </a:lnTo>
+                  <a:lnTo>
+                    <a:pt x="6326143" y="30129"/>
+                  </a:lnTo>
+                  <a:lnTo>
+                    <a:pt x="6410491" y="30129"/>
+                  </a:lnTo>
+                  <a:lnTo>
+                    <a:pt x="6410491" y="30129"/>
+                  </a:lnTo>
+                  <a:lnTo>
+                    <a:pt x="6494840" y="30129"/>
+                  </a:lnTo>
+                  <a:lnTo>
+                    <a:pt x="6494840" y="30129"/>
+                  </a:lnTo>
+                  <a:lnTo>
+                    <a:pt x="6579188" y="30129"/>
+                  </a:lnTo>
+                  <a:lnTo>
+                    <a:pt x="6579188" y="30129"/>
+                  </a:lnTo>
+                  <a:lnTo>
+                    <a:pt x="6663537" y="30129"/>
+                  </a:lnTo>
+                  <a:lnTo>
+                    <a:pt x="6663537" y="30129"/>
+                  </a:lnTo>
+                  <a:lnTo>
+                    <a:pt x="6747886" y="30129"/>
+                  </a:lnTo>
+                  <a:lnTo>
+                    <a:pt x="6747886" y="15060"/>
+                  </a:lnTo>
+                  <a:lnTo>
+                    <a:pt x="6832234" y="15060"/>
+                  </a:lnTo>
+                  <a:lnTo>
+                    <a:pt x="6832234" y="15060"/>
+                  </a:lnTo>
+                  <a:lnTo>
+                    <a:pt x="6916583" y="15060"/>
+                  </a:lnTo>
+                  <a:lnTo>
+                    <a:pt x="6916583" y="15060"/>
+                  </a:lnTo>
+                  <a:lnTo>
+                    <a:pt x="7000931" y="15060"/>
+                  </a:lnTo>
+                  <a:lnTo>
+                    <a:pt x="7000931" y="15060"/>
+                  </a:lnTo>
+                  <a:lnTo>
+                    <a:pt x="7085280" y="15060"/>
+                  </a:lnTo>
+                  <a:lnTo>
+                    <a:pt x="7085280" y="15060"/>
+                  </a:lnTo>
+                  <a:lnTo>
+                    <a:pt x="7169628" y="15060"/>
+                  </a:lnTo>
+                  <a:lnTo>
+                    <a:pt x="7169628" y="15060"/>
+                  </a:lnTo>
+                  <a:lnTo>
+                    <a:pt x="7253977" y="15060"/>
                   </a:lnTo>
                   <a:lnTo>
                     <a:pt x="7253977" y="0"/>
@@ -4527,8 +4527,8 @@
           </p:nvSpPr>
           <p:spPr>
             <a:xfrm>
-              <a:off x="4103887" y="5285568"/>
-              <a:ext cx="1422623" cy="109362"/>
+              <a:off x="3777811" y="5285568"/>
+              <a:ext cx="2074773" cy="109362"/>
             </a:xfrm>
             <a:prstGeom prst="rect">
               <a:avLst/>
@@ -4560,7 +4560,7 @@
                   <a:latin typeface="Helvetica"/>
                   <a:cs typeface="Helvetica"/>
                 </a:rPr>
-                <a:t>Days from admission</a:t>
+                <a:t>Days from terlipressin initiation</a:t>
               </a:r>
             </a:p>
           </p:txBody>
